--- a/week3_unixIII/week3.pptx
+++ b/week3_unixIII/week3.pptx
@@ -5,7 +5,7 @@
     <p:sldMasterId id="2147483648" r:id="rId1"/>
   </p:sldMasterIdLst>
   <p:notesMasterIdLst>
-    <p:notesMasterId r:id="rId22"/>
+    <p:notesMasterId r:id="rId23"/>
   </p:notesMasterIdLst>
   <p:sldIdLst>
     <p:sldId id="256" r:id="rId2"/>
@@ -21,13 +21,14 @@
     <p:sldId id="299" r:id="rId12"/>
     <p:sldId id="300" r:id="rId13"/>
     <p:sldId id="290" r:id="rId14"/>
-    <p:sldId id="306" r:id="rId15"/>
-    <p:sldId id="307" r:id="rId16"/>
-    <p:sldId id="277" r:id="rId17"/>
-    <p:sldId id="264" r:id="rId18"/>
-    <p:sldId id="265" r:id="rId19"/>
-    <p:sldId id="305" r:id="rId20"/>
-    <p:sldId id="304" r:id="rId21"/>
+    <p:sldId id="308" r:id="rId15"/>
+    <p:sldId id="306" r:id="rId16"/>
+    <p:sldId id="307" r:id="rId17"/>
+    <p:sldId id="277" r:id="rId18"/>
+    <p:sldId id="264" r:id="rId19"/>
+    <p:sldId id="265" r:id="rId20"/>
+    <p:sldId id="305" r:id="rId21"/>
+    <p:sldId id="304" r:id="rId22"/>
   </p:sldIdLst>
   <p:sldSz cx="9144000" cy="6858000" type="screen4x3"/>
   <p:notesSz cx="6858000" cy="9144000"/>
@@ -643,7 +644,7 @@
           <a:p>
             <a:fld id="{ADBCFDAE-124A-0F48-98A3-F781E8D4D597}" type="slidenum">
               <a:rPr lang="en-US" smtClean="0"/>
-              <a:t>16</a:t>
+              <a:t>17</a:t>
             </a:fld>
             <a:endParaRPr lang="en-US"/>
           </a:p>
@@ -6787,10 +6788,10 @@
       </p:grpSpPr>
       <p:sp>
         <p:nvSpPr>
-          <p:cNvPr id="2" name="TextBox 1">
+          <p:cNvPr id="3" name="TextBox 2">
             <a:extLst>
               <a:ext uri="{FF2B5EF4-FFF2-40B4-BE49-F238E27FC236}">
-                <a16:creationId xmlns:a16="http://schemas.microsoft.com/office/drawing/2014/main" id="{CFE30CB1-009A-91CC-1353-52C4E628DEA4}"/>
+                <a16:creationId xmlns:a16="http://schemas.microsoft.com/office/drawing/2014/main" id="{3CBCDF8C-94FF-0A23-A741-E4EA69BBAA2E}"/>
               </a:ext>
             </a:extLst>
           </p:cNvPr>
@@ -6799,35 +6800,79 @@
         </p:nvSpPr>
         <p:spPr>
           <a:xfrm>
-            <a:off x="533062" y="431781"/>
-            <a:ext cx="7680308" cy="584775"/>
+            <a:off x="435932" y="2786584"/>
+            <a:ext cx="8272131" cy="646331"/>
           </a:xfrm>
           <a:prstGeom prst="rect">
             <a:avLst/>
           </a:prstGeom>
-          <a:noFill/>
-        </p:spPr>
-        <p:txBody>
-          <a:bodyPr wrap="none" rtlCol="0">
+          <a:solidFill>
+            <a:schemeClr val="bg1">
+              <a:lumMod val="95000"/>
+            </a:schemeClr>
+          </a:solidFill>
+        </p:spPr>
+        <p:txBody>
+          <a:bodyPr wrap="square">
             <a:spAutoFit/>
           </a:bodyPr>
           <a:lstStyle/>
           <a:p>
             <a:r>
-              <a:rPr lang="en-US" sz="3200" b="1" dirty="0">
-                <a:latin typeface="Helvetica Light" panose="020B0403020202020204" pitchFamily="34" charset="0"/>
-              </a:rPr>
-              <a:t>Sources of output, and redirection control</a:t>
-            </a:r>
-          </a:p>
-        </p:txBody>
-      </p:sp>
-      <p:sp>
-        <p:nvSpPr>
-          <p:cNvPr id="3" name="TextBox 2">
+              <a:rPr lang="en-US" dirty="0">
+                <a:latin typeface="Courier New" panose="02070309020205020404" pitchFamily="49" charset="0"/>
+                <a:cs typeface="Courier New" panose="02070309020205020404" pitchFamily="49" charset="0"/>
+              </a:rPr>
+              <a:t>$ bwa mem </a:t>
+            </a:r>
+            <a:r>
+              <a:rPr lang="en-US" dirty="0" err="1">
+                <a:latin typeface="Courier New" panose="02070309020205020404" pitchFamily="49" charset="0"/>
+                <a:cs typeface="Courier New" panose="02070309020205020404" pitchFamily="49" charset="0"/>
+              </a:rPr>
+              <a:t>reference.fasta</a:t>
+            </a:r>
+            <a:r>
+              <a:rPr lang="en-US" dirty="0">
+                <a:latin typeface="Courier New" panose="02070309020205020404" pitchFamily="49" charset="0"/>
+                <a:cs typeface="Courier New" panose="02070309020205020404" pitchFamily="49" charset="0"/>
+              </a:rPr>
+              <a:t> reads_R1.fastq.gz reads_R2.fastq.gz | </a:t>
+            </a:r>
+            <a:r>
+              <a:rPr lang="en-US" dirty="0" err="1">
+                <a:latin typeface="Courier New" panose="02070309020205020404" pitchFamily="49" charset="0"/>
+                <a:cs typeface="Courier New" panose="02070309020205020404" pitchFamily="49" charset="0"/>
+              </a:rPr>
+              <a:t>samtools</a:t>
+            </a:r>
+            <a:r>
+              <a:rPr lang="en-US" dirty="0">
+                <a:latin typeface="Courier New" panose="02070309020205020404" pitchFamily="49" charset="0"/>
+                <a:cs typeface="Courier New" panose="02070309020205020404" pitchFamily="49" charset="0"/>
+              </a:rPr>
+              <a:t> sort -o </a:t>
+            </a:r>
+            <a:r>
+              <a:rPr lang="en-US" dirty="0" err="1">
+                <a:latin typeface="Courier New" panose="02070309020205020404" pitchFamily="49" charset="0"/>
+                <a:cs typeface="Courier New" panose="02070309020205020404" pitchFamily="49" charset="0"/>
+              </a:rPr>
+              <a:t>sample.sorted.bam</a:t>
+            </a:r>
+            <a:endParaRPr lang="en-US" dirty="0">
+              <a:latin typeface="Courier New" panose="02070309020205020404" pitchFamily="49" charset="0"/>
+              <a:cs typeface="Courier New" panose="02070309020205020404" pitchFamily="49" charset="0"/>
+            </a:endParaRPr>
+          </a:p>
+        </p:txBody>
+      </p:sp>
+      <p:sp>
+        <p:nvSpPr>
+          <p:cNvPr id="4" name="TextBox 3">
             <a:extLst>
               <a:ext uri="{FF2B5EF4-FFF2-40B4-BE49-F238E27FC236}">
-                <a16:creationId xmlns:a16="http://schemas.microsoft.com/office/drawing/2014/main" id="{35308177-AD7A-5473-146D-65B031D671CB}"/>
+                <a16:creationId xmlns:a16="http://schemas.microsoft.com/office/drawing/2014/main" id="{D8DE2098-4699-2482-D9CA-C0EF9BD588B5}"/>
               </a:ext>
             </a:extLst>
           </p:cNvPr>
@@ -6836,8 +6881,8 @@
         </p:nvSpPr>
         <p:spPr>
           <a:xfrm>
-            <a:off x="533062" y="1520456"/>
-            <a:ext cx="8419552" cy="1446550"/>
+            <a:off x="352309" y="229762"/>
+            <a:ext cx="8143105" cy="1077218"/>
           </a:xfrm>
           <a:prstGeom prst="rect">
             <a:avLst/>
@@ -6851,97 +6896,268 @@
           <a:lstStyle/>
           <a:p>
             <a:r>
-              <a:rPr lang="en-US" sz="2200" b="1" dirty="0">
-                <a:latin typeface="HELVETICA LIGHT" panose="020B0403020202020204" pitchFamily="34" charset="0"/>
-              </a:rPr>
-              <a:t>Standard </a:t>
-            </a:r>
-            <a:r>
-              <a:rPr lang="en-US" sz="2200" b="1" dirty="0">
-                <a:latin typeface="Helvetica Light" panose="020B0403020202020204" pitchFamily="34" charset="0"/>
-              </a:rPr>
-              <a:t>output </a:t>
-            </a:r>
-            <a:r>
-              <a:rPr lang="en-US" sz="2200" dirty="0">
-                <a:latin typeface="Helvetica Light" panose="020B0403020202020204" pitchFamily="34" charset="0"/>
-              </a:rPr>
-              <a:t>(`</a:t>
-            </a:r>
-            <a:r>
-              <a:rPr lang="en-US" sz="2200" dirty="0" err="1">
-                <a:latin typeface="Helvetica Light" panose="020B0403020202020204" pitchFamily="34" charset="0"/>
-              </a:rPr>
-              <a:t>stdout</a:t>
-            </a:r>
-            <a:r>
-              <a:rPr lang="en-US" sz="2200" dirty="0">
-                <a:latin typeface="Helvetica Light" panose="020B0403020202020204" pitchFamily="34" charset="0"/>
-              </a:rPr>
-              <a:t>`) - the normal output produced by a command.</a:t>
-            </a:r>
-          </a:p>
-          <a:p>
-            <a:endParaRPr lang="en-US" sz="2200" dirty="0">
-              <a:latin typeface="Helvetica Light" panose="020B0403020202020204" pitchFamily="34" charset="0"/>
-            </a:endParaRPr>
-          </a:p>
-          <a:p>
-            <a:r>
-              <a:rPr lang="en-US" sz="2200" b="1" dirty="0">
-                <a:latin typeface="HELVETICA LIGHT" panose="020B0403020202020204" pitchFamily="34" charset="0"/>
-              </a:rPr>
-              <a:t>Standard </a:t>
-            </a:r>
-            <a:r>
-              <a:rPr lang="en-US" sz="2200" b="1" dirty="0">
-                <a:latin typeface="Helvetica Light" panose="020B0403020202020204" pitchFamily="34" charset="0"/>
-              </a:rPr>
-              <a:t>error </a:t>
-            </a:r>
-            <a:r>
-              <a:rPr lang="en-US" sz="2200" dirty="0">
-                <a:latin typeface="Helvetica Light" panose="020B0403020202020204" pitchFamily="34" charset="0"/>
-              </a:rPr>
-              <a:t>(`stderr`) - error messages and warnings.</a:t>
-            </a:r>
-          </a:p>
-        </p:txBody>
-      </p:sp>
-      <p:pic>
-        <p:nvPicPr>
-          <p:cNvPr id="7" name="Picture 6">
+              <a:rPr lang="en-US" sz="3200" b="1" dirty="0">
+                <a:latin typeface="Helvetica Light" panose="020B0403020202020204" pitchFamily="34" charset="0"/>
+              </a:rPr>
+              <a:t>Linux pipelines do a lot of the heavy lifting in genomics and bioinformatics</a:t>
+            </a:r>
+          </a:p>
+        </p:txBody>
+      </p:sp>
+      <p:sp>
+        <p:nvSpPr>
+          <p:cNvPr id="5" name="TextBox 4">
             <a:extLst>
               <a:ext uri="{FF2B5EF4-FFF2-40B4-BE49-F238E27FC236}">
-                <a16:creationId xmlns:a16="http://schemas.microsoft.com/office/drawing/2014/main" id="{9CE3D244-E483-A305-666B-234A36BC712B}"/>
+                <a16:creationId xmlns:a16="http://schemas.microsoft.com/office/drawing/2014/main" id="{7D64E297-1CCF-2E37-1FF8-80704704E89F}"/>
               </a:ext>
             </a:extLst>
           </p:cNvPr>
-          <p:cNvPicPr>
-            <a:picLocks noChangeAspect="1"/>
-          </p:cNvPicPr>
+          <p:cNvSpPr txBox="1"/>
           <p:nvPr/>
-        </p:nvPicPr>
-        <p:blipFill>
-          <a:blip r:embed="rId2"/>
-          <a:stretch>
-            <a:fillRect/>
-          </a:stretch>
-        </p:blipFill>
+        </p:nvSpPr>
         <p:spPr>
           <a:xfrm>
-            <a:off x="1921451" y="3429000"/>
-            <a:ext cx="4903529" cy="2235856"/>
+            <a:off x="435932" y="4956176"/>
+            <a:ext cx="8272131" cy="1200329"/>
           </a:xfrm>
           <a:prstGeom prst="rect">
             <a:avLst/>
           </a:prstGeom>
-        </p:spPr>
-      </p:pic>
+          <a:solidFill>
+            <a:schemeClr val="bg1">
+              <a:lumMod val="95000"/>
+            </a:schemeClr>
+          </a:solidFill>
+        </p:spPr>
+        <p:txBody>
+          <a:bodyPr wrap="square">
+            <a:spAutoFit/>
+          </a:bodyPr>
+          <a:lstStyle/>
+          <a:p>
+            <a:r>
+              <a:rPr lang="en-US" dirty="0">
+                <a:latin typeface="Courier New" panose="02070309020205020404" pitchFamily="49" charset="0"/>
+                <a:cs typeface="Courier New" panose="02070309020205020404" pitchFamily="49" charset="0"/>
+              </a:rPr>
+              <a:t>$ </a:t>
+            </a:r>
+            <a:r>
+              <a:rPr lang="en-US" dirty="0" err="1">
+                <a:latin typeface="Courier New" panose="02070309020205020404" pitchFamily="49" charset="0"/>
+                <a:cs typeface="Courier New" panose="02070309020205020404" pitchFamily="49" charset="0"/>
+              </a:rPr>
+              <a:t>bcftools</a:t>
+            </a:r>
+            <a:r>
+              <a:rPr lang="en-US" dirty="0">
+                <a:latin typeface="Courier New" panose="02070309020205020404" pitchFamily="49" charset="0"/>
+                <a:cs typeface="Courier New" panose="02070309020205020404" pitchFamily="49" charset="0"/>
+              </a:rPr>
+              <a:t> </a:t>
+            </a:r>
+            <a:r>
+              <a:rPr lang="en-US" dirty="0" err="1">
+                <a:latin typeface="Courier New" panose="02070309020205020404" pitchFamily="49" charset="0"/>
+                <a:cs typeface="Courier New" panose="02070309020205020404" pitchFamily="49" charset="0"/>
+              </a:rPr>
+              <a:t>mpileup</a:t>
+            </a:r>
+            <a:r>
+              <a:rPr lang="en-US" dirty="0">
+                <a:latin typeface="Courier New" panose="02070309020205020404" pitchFamily="49" charset="0"/>
+                <a:cs typeface="Courier New" panose="02070309020205020404" pitchFamily="49" charset="0"/>
+              </a:rPr>
+              <a:t> -Ou -f </a:t>
+            </a:r>
+            <a:r>
+              <a:rPr lang="en-US" dirty="0" err="1">
+                <a:latin typeface="Courier New" panose="02070309020205020404" pitchFamily="49" charset="0"/>
+                <a:cs typeface="Courier New" panose="02070309020205020404" pitchFamily="49" charset="0"/>
+              </a:rPr>
+              <a:t>reference.fasta</a:t>
+            </a:r>
+            <a:r>
+              <a:rPr lang="en-US" dirty="0">
+                <a:latin typeface="Courier New" panose="02070309020205020404" pitchFamily="49" charset="0"/>
+                <a:cs typeface="Courier New" panose="02070309020205020404" pitchFamily="49" charset="0"/>
+              </a:rPr>
+              <a:t> *.bam |</a:t>
+            </a:r>
+          </a:p>
+          <a:p>
+            <a:r>
+              <a:rPr lang="en-US" dirty="0">
+                <a:latin typeface="Courier New" panose="02070309020205020404" pitchFamily="49" charset="0"/>
+                <a:cs typeface="Courier New" panose="02070309020205020404" pitchFamily="49" charset="0"/>
+              </a:rPr>
+              <a:t>    </a:t>
+            </a:r>
+            <a:r>
+              <a:rPr lang="en-US" dirty="0" err="1">
+                <a:latin typeface="Courier New" panose="02070309020205020404" pitchFamily="49" charset="0"/>
+                <a:cs typeface="Courier New" panose="02070309020205020404" pitchFamily="49" charset="0"/>
+              </a:rPr>
+              <a:t>bcftools</a:t>
+            </a:r>
+            <a:r>
+              <a:rPr lang="en-US" dirty="0">
+                <a:latin typeface="Courier New" panose="02070309020205020404" pitchFamily="49" charset="0"/>
+                <a:cs typeface="Courier New" panose="02070309020205020404" pitchFamily="49" charset="0"/>
+              </a:rPr>
+              <a:t> call -mv -Ou |</a:t>
+            </a:r>
+          </a:p>
+          <a:p>
+            <a:r>
+              <a:rPr lang="en-US" dirty="0">
+                <a:latin typeface="Courier New" panose="02070309020205020404" pitchFamily="49" charset="0"/>
+                <a:cs typeface="Courier New" panose="02070309020205020404" pitchFamily="49" charset="0"/>
+              </a:rPr>
+              <a:t>    </a:t>
+            </a:r>
+            <a:r>
+              <a:rPr lang="en-US" dirty="0" err="1">
+                <a:latin typeface="Courier New" panose="02070309020205020404" pitchFamily="49" charset="0"/>
+                <a:cs typeface="Courier New" panose="02070309020205020404" pitchFamily="49" charset="0"/>
+              </a:rPr>
+              <a:t>bcftools</a:t>
+            </a:r>
+            <a:r>
+              <a:rPr lang="en-US" dirty="0">
+                <a:latin typeface="Courier New" panose="02070309020205020404" pitchFamily="49" charset="0"/>
+                <a:cs typeface="Courier New" panose="02070309020205020404" pitchFamily="49" charset="0"/>
+              </a:rPr>
+              <a:t> filter -</a:t>
+            </a:r>
+            <a:r>
+              <a:rPr lang="en-US" dirty="0" err="1">
+                <a:latin typeface="Courier New" panose="02070309020205020404" pitchFamily="49" charset="0"/>
+                <a:cs typeface="Courier New" panose="02070309020205020404" pitchFamily="49" charset="0"/>
+              </a:rPr>
+              <a:t>i</a:t>
+            </a:r>
+            <a:r>
+              <a:rPr lang="en-US" dirty="0">
+                <a:latin typeface="Courier New" panose="02070309020205020404" pitchFamily="49" charset="0"/>
+                <a:cs typeface="Courier New" panose="02070309020205020404" pitchFamily="49" charset="0"/>
+              </a:rPr>
+              <a:t> 'QUAL&gt;30' -Oz \</a:t>
+            </a:r>
+          </a:p>
+          <a:p>
+            <a:r>
+              <a:rPr lang="en-US" dirty="0">
+                <a:latin typeface="Courier New" panose="02070309020205020404" pitchFamily="49" charset="0"/>
+                <a:cs typeface="Courier New" panose="02070309020205020404" pitchFamily="49" charset="0"/>
+              </a:rPr>
+              <a:t>    &gt; </a:t>
+            </a:r>
+            <a:r>
+              <a:rPr lang="en-US" dirty="0" err="1">
+                <a:latin typeface="Courier New" panose="02070309020205020404" pitchFamily="49" charset="0"/>
+                <a:cs typeface="Courier New" panose="02070309020205020404" pitchFamily="49" charset="0"/>
+              </a:rPr>
+              <a:t>variants.filtered.vcf.gz</a:t>
+            </a:r>
+            <a:endParaRPr lang="en-US" dirty="0">
+              <a:latin typeface="Courier New" panose="02070309020205020404" pitchFamily="49" charset="0"/>
+              <a:cs typeface="Courier New" panose="02070309020205020404" pitchFamily="49" charset="0"/>
+            </a:endParaRPr>
+          </a:p>
+        </p:txBody>
+      </p:sp>
+      <p:sp>
+        <p:nvSpPr>
+          <p:cNvPr id="6" name="TextBox 5">
+            <a:extLst>
+              <a:ext uri="{FF2B5EF4-FFF2-40B4-BE49-F238E27FC236}">
+                <a16:creationId xmlns:a16="http://schemas.microsoft.com/office/drawing/2014/main" id="{71FC1C6A-03AC-34EE-216E-E1993941FD03}"/>
+              </a:ext>
+            </a:extLst>
+          </p:cNvPr>
+          <p:cNvSpPr txBox="1"/>
+          <p:nvPr/>
+        </p:nvSpPr>
+        <p:spPr>
+          <a:xfrm>
+            <a:off x="435932" y="1884226"/>
+            <a:ext cx="8419552" cy="707886"/>
+          </a:xfrm>
+          <a:prstGeom prst="rect">
+            <a:avLst/>
+          </a:prstGeom>
+          <a:noFill/>
+        </p:spPr>
+        <p:txBody>
+          <a:bodyPr wrap="square" rtlCol="0">
+            <a:spAutoFit/>
+          </a:bodyPr>
+          <a:lstStyle/>
+          <a:p>
+            <a:r>
+              <a:rPr lang="en-US" sz="2000" dirty="0">
+                <a:latin typeface="Helvetica Light" panose="020B0403020202020204" pitchFamily="34" charset="0"/>
+              </a:rPr>
+              <a:t>Example of mapping DNA sequences to a reference genome for whole genome resequencing analysis:</a:t>
+            </a:r>
+          </a:p>
+        </p:txBody>
+      </p:sp>
+      <p:sp>
+        <p:nvSpPr>
+          <p:cNvPr id="9" name="TextBox 8">
+            <a:extLst>
+              <a:ext uri="{FF2B5EF4-FFF2-40B4-BE49-F238E27FC236}">
+                <a16:creationId xmlns:a16="http://schemas.microsoft.com/office/drawing/2014/main" id="{406A0C2B-F0AD-C21F-DBD7-288FCE222AFC}"/>
+              </a:ext>
+            </a:extLst>
+          </p:cNvPr>
+          <p:cNvSpPr txBox="1"/>
+          <p:nvPr/>
+        </p:nvSpPr>
+        <p:spPr>
+          <a:xfrm>
+            <a:off x="362221" y="3911946"/>
+            <a:ext cx="8419552" cy="707886"/>
+          </a:xfrm>
+          <a:prstGeom prst="rect">
+            <a:avLst/>
+          </a:prstGeom>
+          <a:noFill/>
+        </p:spPr>
+        <p:txBody>
+          <a:bodyPr wrap="square" rtlCol="0">
+            <a:spAutoFit/>
+          </a:bodyPr>
+          <a:lstStyle/>
+          <a:p>
+            <a:r>
+              <a:rPr lang="en-US" sz="2000" dirty="0">
+                <a:latin typeface="Helvetica Light" panose="020B0403020202020204" pitchFamily="34" charset="0"/>
+              </a:rPr>
+              <a:t>Calling variants (single nucleotide polymorphisms) in many genome </a:t>
+            </a:r>
+            <a:r>
+              <a:rPr lang="en-US" sz="2000" dirty="0" err="1">
+                <a:latin typeface="Helvetica Light" panose="020B0403020202020204" pitchFamily="34" charset="0"/>
+              </a:rPr>
+              <a:t>aligntments</a:t>
+            </a:r>
+            <a:r>
+              <a:rPr lang="en-US" sz="2000" dirty="0">
+                <a:latin typeface="Helvetica Light" panose="020B0403020202020204" pitchFamily="34" charset="0"/>
+              </a:rPr>
+              <a:t>:</a:t>
+            </a:r>
+          </a:p>
+        </p:txBody>
+      </p:sp>
     </p:spTree>
     <p:extLst>
       <p:ext uri="{BB962C8B-B14F-4D97-AF65-F5344CB8AC3E}">
-        <p14:creationId xmlns:p14="http://schemas.microsoft.com/office/powerpoint/2010/main" val="1305945945"/>
+        <p14:creationId xmlns:p14="http://schemas.microsoft.com/office/powerpoint/2010/main" val="902060769"/>
       </p:ext>
     </p:extLst>
   </p:cSld>
@@ -6973,6 +7189,189 @@
           <p:cNvPr id="2" name="TextBox 1">
             <a:extLst>
               <a:ext uri="{FF2B5EF4-FFF2-40B4-BE49-F238E27FC236}">
+                <a16:creationId xmlns:a16="http://schemas.microsoft.com/office/drawing/2014/main" id="{CFE30CB1-009A-91CC-1353-52C4E628DEA4}"/>
+              </a:ext>
+            </a:extLst>
+          </p:cNvPr>
+          <p:cNvSpPr txBox="1"/>
+          <p:nvPr/>
+        </p:nvSpPr>
+        <p:spPr>
+          <a:xfrm>
+            <a:off x="533062" y="431781"/>
+            <a:ext cx="7680308" cy="584775"/>
+          </a:xfrm>
+          <a:prstGeom prst="rect">
+            <a:avLst/>
+          </a:prstGeom>
+          <a:noFill/>
+        </p:spPr>
+        <p:txBody>
+          <a:bodyPr wrap="none" rtlCol="0">
+            <a:spAutoFit/>
+          </a:bodyPr>
+          <a:lstStyle/>
+          <a:p>
+            <a:r>
+              <a:rPr lang="en-US" sz="3200" b="1" dirty="0">
+                <a:latin typeface="Helvetica Light" panose="020B0403020202020204" pitchFamily="34" charset="0"/>
+              </a:rPr>
+              <a:t>Sources of output, and redirection control</a:t>
+            </a:r>
+          </a:p>
+        </p:txBody>
+      </p:sp>
+      <p:sp>
+        <p:nvSpPr>
+          <p:cNvPr id="3" name="TextBox 2">
+            <a:extLst>
+              <a:ext uri="{FF2B5EF4-FFF2-40B4-BE49-F238E27FC236}">
+                <a16:creationId xmlns:a16="http://schemas.microsoft.com/office/drawing/2014/main" id="{35308177-AD7A-5473-146D-65B031D671CB}"/>
+              </a:ext>
+            </a:extLst>
+          </p:cNvPr>
+          <p:cNvSpPr txBox="1"/>
+          <p:nvPr/>
+        </p:nvSpPr>
+        <p:spPr>
+          <a:xfrm>
+            <a:off x="533062" y="1520456"/>
+            <a:ext cx="8419552" cy="1446550"/>
+          </a:xfrm>
+          <a:prstGeom prst="rect">
+            <a:avLst/>
+          </a:prstGeom>
+          <a:noFill/>
+        </p:spPr>
+        <p:txBody>
+          <a:bodyPr wrap="square" rtlCol="0">
+            <a:spAutoFit/>
+          </a:bodyPr>
+          <a:lstStyle/>
+          <a:p>
+            <a:r>
+              <a:rPr lang="en-US" sz="2200" b="1" dirty="0">
+                <a:latin typeface="HELVETICA LIGHT" panose="020B0403020202020204" pitchFamily="34" charset="0"/>
+              </a:rPr>
+              <a:t>Standard </a:t>
+            </a:r>
+            <a:r>
+              <a:rPr lang="en-US" sz="2200" b="1" dirty="0">
+                <a:latin typeface="Helvetica Light" panose="020B0403020202020204" pitchFamily="34" charset="0"/>
+              </a:rPr>
+              <a:t>output </a:t>
+            </a:r>
+            <a:r>
+              <a:rPr lang="en-US" sz="2200" dirty="0">
+                <a:latin typeface="Helvetica Light" panose="020B0403020202020204" pitchFamily="34" charset="0"/>
+              </a:rPr>
+              <a:t>(`</a:t>
+            </a:r>
+            <a:r>
+              <a:rPr lang="en-US" sz="2200" dirty="0" err="1">
+                <a:latin typeface="Helvetica Light" panose="020B0403020202020204" pitchFamily="34" charset="0"/>
+              </a:rPr>
+              <a:t>stdout</a:t>
+            </a:r>
+            <a:r>
+              <a:rPr lang="en-US" sz="2200" dirty="0">
+                <a:latin typeface="Helvetica Light" panose="020B0403020202020204" pitchFamily="34" charset="0"/>
+              </a:rPr>
+              <a:t>`) - the normal output produced by a command.</a:t>
+            </a:r>
+          </a:p>
+          <a:p>
+            <a:endParaRPr lang="en-US" sz="2200" dirty="0">
+              <a:latin typeface="Helvetica Light" panose="020B0403020202020204" pitchFamily="34" charset="0"/>
+            </a:endParaRPr>
+          </a:p>
+          <a:p>
+            <a:r>
+              <a:rPr lang="en-US" sz="2200" b="1" dirty="0">
+                <a:latin typeface="HELVETICA LIGHT" panose="020B0403020202020204" pitchFamily="34" charset="0"/>
+              </a:rPr>
+              <a:t>Standard </a:t>
+            </a:r>
+            <a:r>
+              <a:rPr lang="en-US" sz="2200" b="1" dirty="0">
+                <a:latin typeface="Helvetica Light" panose="020B0403020202020204" pitchFamily="34" charset="0"/>
+              </a:rPr>
+              <a:t>error </a:t>
+            </a:r>
+            <a:r>
+              <a:rPr lang="en-US" sz="2200" dirty="0">
+                <a:latin typeface="Helvetica Light" panose="020B0403020202020204" pitchFamily="34" charset="0"/>
+              </a:rPr>
+              <a:t>(`stderr`) - error messages and warnings.</a:t>
+            </a:r>
+          </a:p>
+        </p:txBody>
+      </p:sp>
+      <p:pic>
+        <p:nvPicPr>
+          <p:cNvPr id="7" name="Picture 6">
+            <a:extLst>
+              <a:ext uri="{FF2B5EF4-FFF2-40B4-BE49-F238E27FC236}">
+                <a16:creationId xmlns:a16="http://schemas.microsoft.com/office/drawing/2014/main" id="{9CE3D244-E483-A305-666B-234A36BC712B}"/>
+              </a:ext>
+            </a:extLst>
+          </p:cNvPr>
+          <p:cNvPicPr>
+            <a:picLocks noChangeAspect="1"/>
+          </p:cNvPicPr>
+          <p:nvPr/>
+        </p:nvPicPr>
+        <p:blipFill>
+          <a:blip r:embed="rId2"/>
+          <a:stretch>
+            <a:fillRect/>
+          </a:stretch>
+        </p:blipFill>
+        <p:spPr>
+          <a:xfrm>
+            <a:off x="1921451" y="3429000"/>
+            <a:ext cx="4903529" cy="2235856"/>
+          </a:xfrm>
+          <a:prstGeom prst="rect">
+            <a:avLst/>
+          </a:prstGeom>
+        </p:spPr>
+      </p:pic>
+    </p:spTree>
+    <p:extLst>
+      <p:ext uri="{BB962C8B-B14F-4D97-AF65-F5344CB8AC3E}">
+        <p14:creationId xmlns:p14="http://schemas.microsoft.com/office/powerpoint/2010/main" val="1305945945"/>
+      </p:ext>
+    </p:extLst>
+  </p:cSld>
+  <p:clrMapOvr>
+    <a:masterClrMapping/>
+  </p:clrMapOvr>
+</p:sld>
+</file>
+
+<file path=ppt/slides/slide16.xml><?xml version="1.0" encoding="utf-8"?>
+<p:sld xmlns:a="http://schemas.openxmlformats.org/drawingml/2006/main" xmlns:r="http://schemas.openxmlformats.org/officeDocument/2006/relationships" xmlns:p="http://schemas.openxmlformats.org/presentationml/2006/main">
+  <p:cSld>
+    <p:spTree>
+      <p:nvGrpSpPr>
+        <p:cNvPr id="1" name=""/>
+        <p:cNvGrpSpPr/>
+        <p:nvPr/>
+      </p:nvGrpSpPr>
+      <p:grpSpPr>
+        <a:xfrm>
+          <a:off x="0" y="0"/>
+          <a:ext cx="0" cy="0"/>
+          <a:chOff x="0" y="0"/>
+          <a:chExt cx="0" cy="0"/>
+        </a:xfrm>
+      </p:grpSpPr>
+      <p:sp>
+        <p:nvSpPr>
+          <p:cNvPr id="2" name="TextBox 1">
+            <a:extLst>
+              <a:ext uri="{FF2B5EF4-FFF2-40B4-BE49-F238E27FC236}">
                 <a16:creationId xmlns:a16="http://schemas.microsoft.com/office/drawing/2014/main" id="{F36DC6D0-BF60-D53D-E1CE-A09855867FE2}"/>
               </a:ext>
             </a:extLst>
@@ -7509,7 +7908,7 @@
 </p:sld>
 </file>
 
-<file path=ppt/slides/slide16.xml><?xml version="1.0" encoding="utf-8"?>
+<file path=ppt/slides/slide17.xml><?xml version="1.0" encoding="utf-8"?>
 <p:sld xmlns:a="http://schemas.openxmlformats.org/drawingml/2006/main" xmlns:r="http://schemas.openxmlformats.org/officeDocument/2006/relationships" xmlns:p="http://schemas.openxmlformats.org/presentationml/2006/main">
   <p:cSld>
     <p:spTree>
@@ -7902,7 +8301,7 @@
 </p:sld>
 </file>
 
-<file path=ppt/slides/slide17.xml><?xml version="1.0" encoding="utf-8"?>
+<file path=ppt/slides/slide18.xml><?xml version="1.0" encoding="utf-8"?>
 <p:sld xmlns:a="http://schemas.openxmlformats.org/drawingml/2006/main" xmlns:r="http://schemas.openxmlformats.org/officeDocument/2006/relationships" xmlns:p="http://schemas.openxmlformats.org/presentationml/2006/main">
   <p:cSld>
     <p:spTree>
@@ -8409,247 +8808,6 @@
 </p:sld>
 </file>
 
-<file path=ppt/slides/slide18.xml><?xml version="1.0" encoding="utf-8"?>
-<p:sld xmlns:a="http://schemas.openxmlformats.org/drawingml/2006/main" xmlns:r="http://schemas.openxmlformats.org/officeDocument/2006/relationships" xmlns:p="http://schemas.openxmlformats.org/presentationml/2006/main">
-  <p:cSld>
-    <p:spTree>
-      <p:nvGrpSpPr>
-        <p:cNvPr id="1" name=""/>
-        <p:cNvGrpSpPr/>
-        <p:nvPr/>
-      </p:nvGrpSpPr>
-      <p:grpSpPr>
-        <a:xfrm>
-          <a:off x="0" y="0"/>
-          <a:ext cx="0" cy="0"/>
-          <a:chOff x="0" y="0"/>
-          <a:chExt cx="0" cy="0"/>
-        </a:xfrm>
-      </p:grpSpPr>
-      <p:sp>
-        <p:nvSpPr>
-          <p:cNvPr id="2" name="Rectangle 1"/>
-          <p:cNvSpPr/>
-          <p:nvPr/>
-        </p:nvSpPr>
-        <p:spPr>
-          <a:xfrm>
-            <a:off x="424706" y="1109009"/>
-            <a:ext cx="5559717" cy="2862322"/>
-          </a:xfrm>
-          <a:prstGeom prst="rect">
-            <a:avLst/>
-          </a:prstGeom>
-          <a:ln>
-            <a:solidFill>
-              <a:srgbClr val="800000"/>
-            </a:solidFill>
-          </a:ln>
-        </p:spPr>
-        <p:txBody>
-          <a:bodyPr wrap="square">
-            <a:spAutoFit/>
-          </a:bodyPr>
-          <a:lstStyle/>
-          <a:p>
-            <a:r>
-              <a:rPr lang="en-US" sz="2000" dirty="0">
-                <a:latin typeface="Helvetica Light" panose="020B0403020202020204" pitchFamily="34" charset="0"/>
-              </a:rPr>
-              <a:t>#!/bin/</a:t>
-            </a:r>
-            <a:r>
-              <a:rPr lang="en-US" sz="2000" dirty="0" err="1">
-                <a:latin typeface="Helvetica Light" panose="020B0403020202020204" pitchFamily="34" charset="0"/>
-              </a:rPr>
-              <a:t>zsh</a:t>
-            </a:r>
-            <a:r>
-              <a:rPr lang="en-US" sz="2000" dirty="0">
-                <a:latin typeface="Helvetica Light" panose="020B0403020202020204" pitchFamily="34" charset="0"/>
-              </a:rPr>
-              <a:t>          </a:t>
-            </a:r>
-          </a:p>
-          <a:p>
-            <a:r>
-              <a:rPr lang="en-US" sz="2000" dirty="0">
-                <a:latin typeface="Helvetica Light" panose="020B0403020202020204" pitchFamily="34" charset="0"/>
-              </a:rPr>
-              <a:t>            echo "The script starts now"</a:t>
-            </a:r>
-          </a:p>
-          <a:p>
-            <a:r>
-              <a:rPr lang="en-US" sz="2000" dirty="0">
-                <a:latin typeface="Helvetica Light" panose="020B0403020202020204" pitchFamily="34" charset="0"/>
-              </a:rPr>
-              <a:t>            echo "Hi, $USER!"</a:t>
-            </a:r>
-          </a:p>
-          <a:p>
-            <a:r>
-              <a:rPr lang="en-US" sz="2000" dirty="0">
-                <a:latin typeface="Helvetica Light" panose="020B0403020202020204" pitchFamily="34" charset="0"/>
-              </a:rPr>
-              <a:t>            echo "I am setting two variables"</a:t>
-            </a:r>
-          </a:p>
-          <a:p>
-            <a:r>
-              <a:rPr lang="en-US" sz="2000" dirty="0">
-                <a:latin typeface="Helvetica Light" panose="020B0403020202020204" pitchFamily="34" charset="0"/>
-              </a:rPr>
-              <a:t>            COLOR="black"</a:t>
-            </a:r>
-          </a:p>
-          <a:p>
-            <a:r>
-              <a:rPr lang="en-US" sz="2000" dirty="0">
-                <a:latin typeface="Helvetica Light" panose="020B0403020202020204" pitchFamily="34" charset="0"/>
-              </a:rPr>
-              <a:t>            VALUE="9"</a:t>
-            </a:r>
-          </a:p>
-          <a:p>
-            <a:r>
-              <a:rPr lang="en-US" sz="2000" dirty="0">
-                <a:latin typeface="Helvetica Light" panose="020B0403020202020204" pitchFamily="34" charset="0"/>
-              </a:rPr>
-              <a:t>            echo "This is a string: $COLOR"</a:t>
-            </a:r>
-          </a:p>
-          <a:p>
-            <a:r>
-              <a:rPr lang="en-US" sz="2000" dirty="0">
-                <a:latin typeface="Helvetica Light" panose="020B0403020202020204" pitchFamily="34" charset="0"/>
-              </a:rPr>
-              <a:t>	     echo "And this is a number: $VALUE"</a:t>
-            </a:r>
-          </a:p>
-          <a:p>
-            <a:r>
-              <a:rPr lang="en-US" sz="2000" dirty="0">
-                <a:latin typeface="Helvetica Light" panose="020B0403020202020204" pitchFamily="34" charset="0"/>
-              </a:rPr>
-              <a:t>	     echo "We are now done"</a:t>
-            </a:r>
-          </a:p>
-        </p:txBody>
-      </p:sp>
-      <p:sp>
-        <p:nvSpPr>
-          <p:cNvPr id="3" name="TextBox 2"/>
-          <p:cNvSpPr txBox="1"/>
-          <p:nvPr/>
-        </p:nvSpPr>
-        <p:spPr>
-          <a:xfrm>
-            <a:off x="1901236" y="237063"/>
-            <a:ext cx="5341527" cy="523220"/>
-          </a:xfrm>
-          <a:prstGeom prst="rect">
-            <a:avLst/>
-          </a:prstGeom>
-          <a:noFill/>
-        </p:spPr>
-        <p:txBody>
-          <a:bodyPr wrap="none" rtlCol="0">
-            <a:spAutoFit/>
-          </a:bodyPr>
-          <a:lstStyle/>
-          <a:p>
-            <a:r>
-              <a:rPr lang="en-US" sz="2800" dirty="0">
-                <a:latin typeface="Helvetica Light" panose="020B0403020202020204" pitchFamily="34" charset="0"/>
-              </a:rPr>
-              <a:t>Simplest bash scripts continued</a:t>
-            </a:r>
-          </a:p>
-        </p:txBody>
-      </p:sp>
-      <p:sp>
-        <p:nvSpPr>
-          <p:cNvPr id="5" name="TextBox 4"/>
-          <p:cNvSpPr txBox="1"/>
-          <p:nvPr/>
-        </p:nvSpPr>
-        <p:spPr>
-          <a:xfrm>
-            <a:off x="6252597" y="1811862"/>
-            <a:ext cx="2685351" cy="1477328"/>
-          </a:xfrm>
-          <a:prstGeom prst="rect">
-            <a:avLst/>
-          </a:prstGeom>
-          <a:noFill/>
-        </p:spPr>
-        <p:txBody>
-          <a:bodyPr wrap="none" rtlCol="0">
-            <a:spAutoFit/>
-          </a:bodyPr>
-          <a:lstStyle/>
-          <a:p>
-            <a:r>
-              <a:rPr lang="en-US" dirty="0">
-                <a:latin typeface="Helvetica Light" panose="020B0403020202020204" pitchFamily="34" charset="0"/>
-              </a:rPr>
-              <a:t>Save this as simple3.sh</a:t>
-            </a:r>
-          </a:p>
-          <a:p>
-            <a:endParaRPr lang="en-US" dirty="0">
-              <a:latin typeface="Helvetica Light" panose="020B0403020202020204" pitchFamily="34" charset="0"/>
-            </a:endParaRPr>
-          </a:p>
-          <a:p>
-            <a:r>
-              <a:rPr lang="en-US" dirty="0">
-                <a:latin typeface="Helvetica Light" panose="020B0403020202020204" pitchFamily="34" charset="0"/>
-              </a:rPr>
-              <a:t>From the command line:</a:t>
-            </a:r>
-          </a:p>
-          <a:p>
-            <a:endParaRPr lang="en-US" dirty="0">
-              <a:latin typeface="Helvetica Light" panose="020B0403020202020204" pitchFamily="34" charset="0"/>
-            </a:endParaRPr>
-          </a:p>
-          <a:p>
-            <a:r>
-              <a:rPr lang="en-US" dirty="0">
-                <a:latin typeface="Helvetica Light" panose="020B0403020202020204" pitchFamily="34" charset="0"/>
-              </a:rPr>
-              <a:t>$ </a:t>
-            </a:r>
-            <a:r>
-              <a:rPr lang="en-US" dirty="0" err="1">
-                <a:latin typeface="Helvetica Light" panose="020B0403020202020204" pitchFamily="34" charset="0"/>
-              </a:rPr>
-              <a:t>zsh</a:t>
-            </a:r>
-            <a:r>
-              <a:rPr lang="en-US" dirty="0">
-                <a:latin typeface="Helvetica Light" panose="020B0403020202020204" pitchFamily="34" charset="0"/>
-              </a:rPr>
-              <a:t> simple3.sh</a:t>
-            </a:r>
-          </a:p>
-        </p:txBody>
-      </p:sp>
-    </p:spTree>
-    <p:extLst>
-      <p:ext uri="{BB962C8B-B14F-4D97-AF65-F5344CB8AC3E}">
-        <p14:creationId xmlns:p14="http://schemas.microsoft.com/office/powerpoint/2010/main" val="1228729614"/>
-      </p:ext>
-    </p:extLst>
-  </p:cSld>
-  <p:clrMapOvr>
-    <a:masterClrMapping/>
-  </p:clrMapOvr>
-</p:sld>
-</file>
-
 <file path=ppt/slides/slide19.xml><?xml version="1.0" encoding="utf-8"?>
 <p:sld xmlns:a="http://schemas.openxmlformats.org/drawingml/2006/main" xmlns:r="http://schemas.openxmlformats.org/officeDocument/2006/relationships" xmlns:p="http://schemas.openxmlformats.org/presentationml/2006/main">
   <p:cSld>
@@ -8669,194 +8827,125 @@
       </p:grpSpPr>
       <p:sp>
         <p:nvSpPr>
-          <p:cNvPr id="2" name="Rectangle 1">
-            <a:extLst>
-              <a:ext uri="{FF2B5EF4-FFF2-40B4-BE49-F238E27FC236}">
-                <a16:creationId xmlns:a16="http://schemas.microsoft.com/office/drawing/2014/main" id="{6664A9D9-D2A0-5640-A20C-9CE223DDBD67}"/>
-              </a:ext>
-            </a:extLst>
-          </p:cNvPr>
+          <p:cNvPr id="2" name="Rectangle 1"/>
           <p:cNvSpPr/>
           <p:nvPr/>
         </p:nvSpPr>
         <p:spPr>
           <a:xfrm>
-            <a:off x="908746" y="3682093"/>
-            <a:ext cx="4684296" cy="1938992"/>
+            <a:off x="424706" y="1109009"/>
+            <a:ext cx="5559717" cy="2862322"/>
           </a:xfrm>
           <a:prstGeom prst="rect">
             <a:avLst/>
           </a:prstGeom>
-        </p:spPr>
-        <p:txBody>
-          <a:bodyPr wrap="none">
+          <a:ln>
+            <a:solidFill>
+              <a:srgbClr val="800000"/>
+            </a:solidFill>
+          </a:ln>
+        </p:spPr>
+        <p:txBody>
+          <a:bodyPr wrap="square">
             <a:spAutoFit/>
           </a:bodyPr>
           <a:lstStyle/>
           <a:p>
             <a:r>
-              <a:rPr lang="en-US" sz="2400" dirty="0">
-                <a:latin typeface="Helvetica Light" panose="020B0403020202020204" pitchFamily="34" charset="0"/>
-              </a:rPr>
-              <a:t>Change the script to executable:</a:t>
-            </a:r>
-          </a:p>
-          <a:p>
-            <a:endParaRPr lang="en-US" sz="2400" b="1" dirty="0">
-              <a:latin typeface="Helvetica Light" panose="020B0403020202020204" pitchFamily="34" charset="0"/>
-            </a:endParaRPr>
-          </a:p>
-          <a:p>
-            <a:r>
-              <a:rPr lang="en-US" sz="2400" b="1" dirty="0">
-                <a:latin typeface="Helvetica Light" panose="020B0403020202020204" pitchFamily="34" charset="0"/>
-              </a:rPr>
-              <a:t>$ </a:t>
-            </a:r>
-            <a:r>
-              <a:rPr lang="en-US" sz="2400" b="1" dirty="0" err="1">
-                <a:latin typeface="Helvetica Light" panose="020B0403020202020204" pitchFamily="34" charset="0"/>
-              </a:rPr>
-              <a:t>chmod</a:t>
-            </a:r>
-            <a:r>
-              <a:rPr lang="en-US" sz="2400" b="1" dirty="0">
-                <a:latin typeface="Helvetica Light" panose="020B0403020202020204" pitchFamily="34" charset="0"/>
-              </a:rPr>
-              <a:t> </a:t>
-            </a:r>
-            <a:r>
-              <a:rPr lang="en-US" sz="2400" b="1" dirty="0" err="1">
-                <a:latin typeface="Helvetica Light" panose="020B0403020202020204" pitchFamily="34" charset="0"/>
-              </a:rPr>
-              <a:t>a+x</a:t>
-            </a:r>
-            <a:r>
-              <a:rPr lang="en-US" sz="2400" b="1" dirty="0">
-                <a:latin typeface="Helvetica Light" panose="020B0403020202020204" pitchFamily="34" charset="0"/>
-              </a:rPr>
-              <a:t> </a:t>
-            </a:r>
-            <a:r>
-              <a:rPr lang="en-US" sz="2400" b="1" dirty="0" err="1">
-                <a:latin typeface="Helvetica Light" panose="020B0403020202020204" pitchFamily="34" charset="0"/>
-              </a:rPr>
-              <a:t>mybash_script.sh</a:t>
-            </a:r>
-            <a:endParaRPr lang="en-US" sz="2400" b="1" dirty="0">
-              <a:latin typeface="Helvetica Light" panose="020B0403020202020204" pitchFamily="34" charset="0"/>
-            </a:endParaRPr>
-          </a:p>
-          <a:p>
-            <a:endParaRPr lang="en-US" sz="2400" b="1" dirty="0">
-              <a:latin typeface="Helvetica Light" panose="020B0403020202020204" pitchFamily="34" charset="0"/>
-            </a:endParaRPr>
-          </a:p>
-          <a:p>
-            <a:r>
-              <a:rPr lang="en-US" sz="2400" b="1" dirty="0">
-                <a:latin typeface="Helvetica Light" panose="020B0403020202020204" pitchFamily="34" charset="0"/>
-              </a:rPr>
-              <a:t>$ ./</a:t>
-            </a:r>
-            <a:r>
-              <a:rPr lang="en-US" sz="2400" b="1" dirty="0" err="1">
-                <a:latin typeface="Helvetica Light" panose="020B0403020202020204" pitchFamily="34" charset="0"/>
-              </a:rPr>
-              <a:t>mybash_script.sh</a:t>
-            </a:r>
-            <a:endParaRPr lang="en-US" sz="2400" b="1" dirty="0">
-              <a:latin typeface="Helvetica Light" panose="020B0403020202020204" pitchFamily="34" charset="0"/>
-            </a:endParaRPr>
-          </a:p>
-        </p:txBody>
-      </p:sp>
-      <p:sp>
-        <p:nvSpPr>
-          <p:cNvPr id="3" name="Rectangle 2">
-            <a:extLst>
-              <a:ext uri="{FF2B5EF4-FFF2-40B4-BE49-F238E27FC236}">
-                <a16:creationId xmlns:a16="http://schemas.microsoft.com/office/drawing/2014/main" id="{AA0E03A0-A82F-4545-83CB-9800DBF4A125}"/>
-              </a:ext>
-            </a:extLst>
-          </p:cNvPr>
-          <p:cNvSpPr/>
-          <p:nvPr/>
-        </p:nvSpPr>
-        <p:spPr>
-          <a:xfrm>
-            <a:off x="908746" y="1458686"/>
-            <a:ext cx="6479659" cy="1200329"/>
-          </a:xfrm>
-          <a:prstGeom prst="rect">
-            <a:avLst/>
-          </a:prstGeom>
-        </p:spPr>
-        <p:txBody>
-          <a:bodyPr wrap="none">
-            <a:spAutoFit/>
-          </a:bodyPr>
-          <a:lstStyle/>
-          <a:p>
-            <a:r>
-              <a:rPr lang="en-US" sz="2400" dirty="0">
-                <a:latin typeface="Helvetica Light" panose="020B0403020202020204" pitchFamily="34" charset="0"/>
-              </a:rPr>
-              <a:t>Specify the interpreter from the command line</a:t>
-            </a:r>
-          </a:p>
-          <a:p>
-            <a:endParaRPr lang="en-US" sz="2400" b="1" dirty="0">
-              <a:latin typeface="Helvetica Light" panose="020B0403020202020204" pitchFamily="34" charset="0"/>
-            </a:endParaRPr>
-          </a:p>
-          <a:p>
-            <a:r>
-              <a:rPr lang="en-US" sz="2400" b="1" dirty="0">
-                <a:latin typeface="Helvetica Light" panose="020B0403020202020204" pitchFamily="34" charset="0"/>
-              </a:rPr>
-              <a:t>$ </a:t>
-            </a:r>
-            <a:r>
-              <a:rPr lang="en-US" sz="2400" b="1" dirty="0" err="1">
+              <a:rPr lang="en-US" sz="2000" dirty="0">
+                <a:latin typeface="Helvetica Light" panose="020B0403020202020204" pitchFamily="34" charset="0"/>
+              </a:rPr>
+              <a:t>#!/bin/</a:t>
+            </a:r>
+            <a:r>
+              <a:rPr lang="en-US" sz="2000" dirty="0" err="1">
                 <a:latin typeface="Helvetica Light" panose="020B0403020202020204" pitchFamily="34" charset="0"/>
               </a:rPr>
               <a:t>zsh</a:t>
             </a:r>
             <a:r>
-              <a:rPr lang="en-US" sz="2400" b="1" dirty="0">
-                <a:latin typeface="Helvetica Light" panose="020B0403020202020204" pitchFamily="34" charset="0"/>
-              </a:rPr>
-              <a:t> </a:t>
-            </a:r>
-            <a:r>
-              <a:rPr lang="en-US" sz="2400" b="1" dirty="0" err="1">
-                <a:latin typeface="Helvetica Light" panose="020B0403020202020204" pitchFamily="34" charset="0"/>
-              </a:rPr>
-              <a:t>mybash_script.sh</a:t>
-            </a:r>
-            <a:endParaRPr lang="en-US" sz="2400" b="1" dirty="0">
-              <a:latin typeface="Helvetica Light" panose="020B0403020202020204" pitchFamily="34" charset="0"/>
-            </a:endParaRPr>
-          </a:p>
-        </p:txBody>
-      </p:sp>
-      <p:sp>
-        <p:nvSpPr>
-          <p:cNvPr id="4" name="TextBox 3">
-            <a:extLst>
-              <a:ext uri="{FF2B5EF4-FFF2-40B4-BE49-F238E27FC236}">
-                <a16:creationId xmlns:a16="http://schemas.microsoft.com/office/drawing/2014/main" id="{B453C886-734D-0847-8D2E-B3772D7B1891}"/>
-              </a:ext>
-            </a:extLst>
-          </p:cNvPr>
+              <a:rPr lang="en-US" sz="2000" dirty="0">
+                <a:latin typeface="Helvetica Light" panose="020B0403020202020204" pitchFamily="34" charset="0"/>
+              </a:rPr>
+              <a:t>          </a:t>
+            </a:r>
+          </a:p>
+          <a:p>
+            <a:r>
+              <a:rPr lang="en-US" sz="2000" dirty="0">
+                <a:latin typeface="Helvetica Light" panose="020B0403020202020204" pitchFamily="34" charset="0"/>
+              </a:rPr>
+              <a:t>            echo "The script starts now"</a:t>
+            </a:r>
+          </a:p>
+          <a:p>
+            <a:r>
+              <a:rPr lang="en-US" sz="2000" dirty="0">
+                <a:latin typeface="Helvetica Light" panose="020B0403020202020204" pitchFamily="34" charset="0"/>
+              </a:rPr>
+              <a:t>            echo "Hi, $USER!"</a:t>
+            </a:r>
+          </a:p>
+          <a:p>
+            <a:r>
+              <a:rPr lang="en-US" sz="2000" dirty="0">
+                <a:latin typeface="Helvetica Light" panose="020B0403020202020204" pitchFamily="34" charset="0"/>
+              </a:rPr>
+              <a:t>            echo "I am setting two variables"</a:t>
+            </a:r>
+          </a:p>
+          <a:p>
+            <a:r>
+              <a:rPr lang="en-US" sz="2000" dirty="0">
+                <a:latin typeface="Helvetica Light" panose="020B0403020202020204" pitchFamily="34" charset="0"/>
+              </a:rPr>
+              <a:t>            COLOR="black"</a:t>
+            </a:r>
+          </a:p>
+          <a:p>
+            <a:r>
+              <a:rPr lang="en-US" sz="2000" dirty="0">
+                <a:latin typeface="Helvetica Light" panose="020B0403020202020204" pitchFamily="34" charset="0"/>
+              </a:rPr>
+              <a:t>            VALUE="9"</a:t>
+            </a:r>
+          </a:p>
+          <a:p>
+            <a:r>
+              <a:rPr lang="en-US" sz="2000" dirty="0">
+                <a:latin typeface="Helvetica Light" panose="020B0403020202020204" pitchFamily="34" charset="0"/>
+              </a:rPr>
+              <a:t>            echo "This is a string: $COLOR"</a:t>
+            </a:r>
+          </a:p>
+          <a:p>
+            <a:r>
+              <a:rPr lang="en-US" sz="2000" dirty="0">
+                <a:latin typeface="Helvetica Light" panose="020B0403020202020204" pitchFamily="34" charset="0"/>
+              </a:rPr>
+              <a:t>	     echo "And this is a number: $VALUE"</a:t>
+            </a:r>
+          </a:p>
+          <a:p>
+            <a:r>
+              <a:rPr lang="en-US" sz="2000" dirty="0">
+                <a:latin typeface="Helvetica Light" panose="020B0403020202020204" pitchFamily="34" charset="0"/>
+              </a:rPr>
+              <a:t>	     echo "We are now done"</a:t>
+            </a:r>
+          </a:p>
+        </p:txBody>
+      </p:sp>
+      <p:sp>
+        <p:nvSpPr>
+          <p:cNvPr id="3" name="TextBox 2"/>
           <p:cNvSpPr txBox="1"/>
           <p:nvPr/>
         </p:nvSpPr>
         <p:spPr>
           <a:xfrm>
             <a:off x="1901236" y="237063"/>
-            <a:ext cx="5041765" cy="523220"/>
+            <a:ext cx="5341527" cy="523220"/>
           </a:xfrm>
           <a:prstGeom prst="rect">
             <a:avLst/>
@@ -8873,7 +8962,76 @@
               <a:rPr lang="en-US" sz="2800" dirty="0">
                 <a:latin typeface="Helvetica Light" panose="020B0403020202020204" pitchFamily="34" charset="0"/>
               </a:rPr>
-              <a:t>Two ways you can run scripts:</a:t>
+              <a:t>Simplest bash scripts continued</a:t>
+            </a:r>
+          </a:p>
+        </p:txBody>
+      </p:sp>
+      <p:sp>
+        <p:nvSpPr>
+          <p:cNvPr id="5" name="TextBox 4"/>
+          <p:cNvSpPr txBox="1"/>
+          <p:nvPr/>
+        </p:nvSpPr>
+        <p:spPr>
+          <a:xfrm>
+            <a:off x="6252597" y="1811862"/>
+            <a:ext cx="2685351" cy="1477328"/>
+          </a:xfrm>
+          <a:prstGeom prst="rect">
+            <a:avLst/>
+          </a:prstGeom>
+          <a:noFill/>
+        </p:spPr>
+        <p:txBody>
+          <a:bodyPr wrap="none" rtlCol="0">
+            <a:spAutoFit/>
+          </a:bodyPr>
+          <a:lstStyle/>
+          <a:p>
+            <a:r>
+              <a:rPr lang="en-US" dirty="0">
+                <a:latin typeface="Helvetica Light" panose="020B0403020202020204" pitchFamily="34" charset="0"/>
+              </a:rPr>
+              <a:t>Save this as simple3.sh</a:t>
+            </a:r>
+          </a:p>
+          <a:p>
+            <a:endParaRPr lang="en-US" dirty="0">
+              <a:latin typeface="Helvetica Light" panose="020B0403020202020204" pitchFamily="34" charset="0"/>
+            </a:endParaRPr>
+          </a:p>
+          <a:p>
+            <a:r>
+              <a:rPr lang="en-US" dirty="0">
+                <a:latin typeface="Helvetica Light" panose="020B0403020202020204" pitchFamily="34" charset="0"/>
+              </a:rPr>
+              <a:t>From the command line:</a:t>
+            </a:r>
+          </a:p>
+          <a:p>
+            <a:endParaRPr lang="en-US" dirty="0">
+              <a:latin typeface="Helvetica Light" panose="020B0403020202020204" pitchFamily="34" charset="0"/>
+            </a:endParaRPr>
+          </a:p>
+          <a:p>
+            <a:r>
+              <a:rPr lang="en-US" dirty="0">
+                <a:latin typeface="Helvetica Light" panose="020B0403020202020204" pitchFamily="34" charset="0"/>
+              </a:rPr>
+              <a:t>$ </a:t>
+            </a:r>
+            <a:r>
+              <a:rPr lang="en-US" dirty="0" err="1">
+                <a:latin typeface="Helvetica Light" panose="020B0403020202020204" pitchFamily="34" charset="0"/>
+              </a:rPr>
+              <a:t>zsh</a:t>
+            </a:r>
+            <a:r>
+              <a:rPr lang="en-US" dirty="0">
+                <a:latin typeface="Helvetica Light" panose="020B0403020202020204" pitchFamily="34" charset="0"/>
+              </a:rPr>
+              <a:t> simple3.sh</a:t>
             </a:r>
           </a:p>
         </p:txBody>
@@ -8881,7 +9039,7 @@
     </p:spTree>
     <p:extLst>
       <p:ext uri="{BB962C8B-B14F-4D97-AF65-F5344CB8AC3E}">
-        <p14:creationId xmlns:p14="http://schemas.microsoft.com/office/powerpoint/2010/main" val="1723000324"/>
+        <p14:creationId xmlns:p14="http://schemas.microsoft.com/office/powerpoint/2010/main" val="1228729614"/>
       </p:ext>
     </p:extLst>
   </p:cSld>
@@ -9380,6 +9538,247 @@
 </file>
 
 <file path=ppt/slides/slide20.xml><?xml version="1.0" encoding="utf-8"?>
+<p:sld xmlns:a="http://schemas.openxmlformats.org/drawingml/2006/main" xmlns:r="http://schemas.openxmlformats.org/officeDocument/2006/relationships" xmlns:p="http://schemas.openxmlformats.org/presentationml/2006/main">
+  <p:cSld>
+    <p:spTree>
+      <p:nvGrpSpPr>
+        <p:cNvPr id="1" name=""/>
+        <p:cNvGrpSpPr/>
+        <p:nvPr/>
+      </p:nvGrpSpPr>
+      <p:grpSpPr>
+        <a:xfrm>
+          <a:off x="0" y="0"/>
+          <a:ext cx="0" cy="0"/>
+          <a:chOff x="0" y="0"/>
+          <a:chExt cx="0" cy="0"/>
+        </a:xfrm>
+      </p:grpSpPr>
+      <p:sp>
+        <p:nvSpPr>
+          <p:cNvPr id="2" name="Rectangle 1">
+            <a:extLst>
+              <a:ext uri="{FF2B5EF4-FFF2-40B4-BE49-F238E27FC236}">
+                <a16:creationId xmlns:a16="http://schemas.microsoft.com/office/drawing/2014/main" id="{6664A9D9-D2A0-5640-A20C-9CE223DDBD67}"/>
+              </a:ext>
+            </a:extLst>
+          </p:cNvPr>
+          <p:cNvSpPr/>
+          <p:nvPr/>
+        </p:nvSpPr>
+        <p:spPr>
+          <a:xfrm>
+            <a:off x="908746" y="3682093"/>
+            <a:ext cx="4684296" cy="1938992"/>
+          </a:xfrm>
+          <a:prstGeom prst="rect">
+            <a:avLst/>
+          </a:prstGeom>
+        </p:spPr>
+        <p:txBody>
+          <a:bodyPr wrap="none">
+            <a:spAutoFit/>
+          </a:bodyPr>
+          <a:lstStyle/>
+          <a:p>
+            <a:r>
+              <a:rPr lang="en-US" sz="2400" dirty="0">
+                <a:latin typeface="Helvetica Light" panose="020B0403020202020204" pitchFamily="34" charset="0"/>
+              </a:rPr>
+              <a:t>Change the script to executable:</a:t>
+            </a:r>
+          </a:p>
+          <a:p>
+            <a:endParaRPr lang="en-US" sz="2400" b="1" dirty="0">
+              <a:latin typeface="Helvetica Light" panose="020B0403020202020204" pitchFamily="34" charset="0"/>
+            </a:endParaRPr>
+          </a:p>
+          <a:p>
+            <a:r>
+              <a:rPr lang="en-US" sz="2400" b="1" dirty="0">
+                <a:latin typeface="Helvetica Light" panose="020B0403020202020204" pitchFamily="34" charset="0"/>
+              </a:rPr>
+              <a:t>$ </a:t>
+            </a:r>
+            <a:r>
+              <a:rPr lang="en-US" sz="2400" b="1" dirty="0" err="1">
+                <a:latin typeface="Helvetica Light" panose="020B0403020202020204" pitchFamily="34" charset="0"/>
+              </a:rPr>
+              <a:t>chmod</a:t>
+            </a:r>
+            <a:r>
+              <a:rPr lang="en-US" sz="2400" b="1" dirty="0">
+                <a:latin typeface="Helvetica Light" panose="020B0403020202020204" pitchFamily="34" charset="0"/>
+              </a:rPr>
+              <a:t> </a:t>
+            </a:r>
+            <a:r>
+              <a:rPr lang="en-US" sz="2400" b="1" dirty="0" err="1">
+                <a:latin typeface="Helvetica Light" panose="020B0403020202020204" pitchFamily="34" charset="0"/>
+              </a:rPr>
+              <a:t>a+x</a:t>
+            </a:r>
+            <a:r>
+              <a:rPr lang="en-US" sz="2400" b="1" dirty="0">
+                <a:latin typeface="Helvetica Light" panose="020B0403020202020204" pitchFamily="34" charset="0"/>
+              </a:rPr>
+              <a:t> </a:t>
+            </a:r>
+            <a:r>
+              <a:rPr lang="en-US" sz="2400" b="1" dirty="0" err="1">
+                <a:latin typeface="Helvetica Light" panose="020B0403020202020204" pitchFamily="34" charset="0"/>
+              </a:rPr>
+              <a:t>mybash_script.sh</a:t>
+            </a:r>
+            <a:endParaRPr lang="en-US" sz="2400" b="1" dirty="0">
+              <a:latin typeface="Helvetica Light" panose="020B0403020202020204" pitchFamily="34" charset="0"/>
+            </a:endParaRPr>
+          </a:p>
+          <a:p>
+            <a:endParaRPr lang="en-US" sz="2400" b="1" dirty="0">
+              <a:latin typeface="Helvetica Light" panose="020B0403020202020204" pitchFamily="34" charset="0"/>
+            </a:endParaRPr>
+          </a:p>
+          <a:p>
+            <a:r>
+              <a:rPr lang="en-US" sz="2400" b="1" dirty="0">
+                <a:latin typeface="Helvetica Light" panose="020B0403020202020204" pitchFamily="34" charset="0"/>
+              </a:rPr>
+              <a:t>$ ./</a:t>
+            </a:r>
+            <a:r>
+              <a:rPr lang="en-US" sz="2400" b="1" dirty="0" err="1">
+                <a:latin typeface="Helvetica Light" panose="020B0403020202020204" pitchFamily="34" charset="0"/>
+              </a:rPr>
+              <a:t>mybash_script.sh</a:t>
+            </a:r>
+            <a:endParaRPr lang="en-US" sz="2400" b="1" dirty="0">
+              <a:latin typeface="Helvetica Light" panose="020B0403020202020204" pitchFamily="34" charset="0"/>
+            </a:endParaRPr>
+          </a:p>
+        </p:txBody>
+      </p:sp>
+      <p:sp>
+        <p:nvSpPr>
+          <p:cNvPr id="3" name="Rectangle 2">
+            <a:extLst>
+              <a:ext uri="{FF2B5EF4-FFF2-40B4-BE49-F238E27FC236}">
+                <a16:creationId xmlns:a16="http://schemas.microsoft.com/office/drawing/2014/main" id="{AA0E03A0-A82F-4545-83CB-9800DBF4A125}"/>
+              </a:ext>
+            </a:extLst>
+          </p:cNvPr>
+          <p:cNvSpPr/>
+          <p:nvPr/>
+        </p:nvSpPr>
+        <p:spPr>
+          <a:xfrm>
+            <a:off x="908746" y="1458686"/>
+            <a:ext cx="6479659" cy="1200329"/>
+          </a:xfrm>
+          <a:prstGeom prst="rect">
+            <a:avLst/>
+          </a:prstGeom>
+        </p:spPr>
+        <p:txBody>
+          <a:bodyPr wrap="none">
+            <a:spAutoFit/>
+          </a:bodyPr>
+          <a:lstStyle/>
+          <a:p>
+            <a:r>
+              <a:rPr lang="en-US" sz="2400" dirty="0">
+                <a:latin typeface="Helvetica Light" panose="020B0403020202020204" pitchFamily="34" charset="0"/>
+              </a:rPr>
+              <a:t>Specify the interpreter from the command line</a:t>
+            </a:r>
+          </a:p>
+          <a:p>
+            <a:endParaRPr lang="en-US" sz="2400" b="1" dirty="0">
+              <a:latin typeface="Helvetica Light" panose="020B0403020202020204" pitchFamily="34" charset="0"/>
+            </a:endParaRPr>
+          </a:p>
+          <a:p>
+            <a:r>
+              <a:rPr lang="en-US" sz="2400" b="1" dirty="0">
+                <a:latin typeface="Helvetica Light" panose="020B0403020202020204" pitchFamily="34" charset="0"/>
+              </a:rPr>
+              <a:t>$ </a:t>
+            </a:r>
+            <a:r>
+              <a:rPr lang="en-US" sz="2400" b="1" dirty="0" err="1">
+                <a:latin typeface="Helvetica Light" panose="020B0403020202020204" pitchFamily="34" charset="0"/>
+              </a:rPr>
+              <a:t>zsh</a:t>
+            </a:r>
+            <a:r>
+              <a:rPr lang="en-US" sz="2400" b="1" dirty="0">
+                <a:latin typeface="Helvetica Light" panose="020B0403020202020204" pitchFamily="34" charset="0"/>
+              </a:rPr>
+              <a:t> </a:t>
+            </a:r>
+            <a:r>
+              <a:rPr lang="en-US" sz="2400" b="1" dirty="0" err="1">
+                <a:latin typeface="Helvetica Light" panose="020B0403020202020204" pitchFamily="34" charset="0"/>
+              </a:rPr>
+              <a:t>mybash_script.sh</a:t>
+            </a:r>
+            <a:endParaRPr lang="en-US" sz="2400" b="1" dirty="0">
+              <a:latin typeface="Helvetica Light" panose="020B0403020202020204" pitchFamily="34" charset="0"/>
+            </a:endParaRPr>
+          </a:p>
+        </p:txBody>
+      </p:sp>
+      <p:sp>
+        <p:nvSpPr>
+          <p:cNvPr id="4" name="TextBox 3">
+            <a:extLst>
+              <a:ext uri="{FF2B5EF4-FFF2-40B4-BE49-F238E27FC236}">
+                <a16:creationId xmlns:a16="http://schemas.microsoft.com/office/drawing/2014/main" id="{B453C886-734D-0847-8D2E-B3772D7B1891}"/>
+              </a:ext>
+            </a:extLst>
+          </p:cNvPr>
+          <p:cNvSpPr txBox="1"/>
+          <p:nvPr/>
+        </p:nvSpPr>
+        <p:spPr>
+          <a:xfrm>
+            <a:off x="1901236" y="237063"/>
+            <a:ext cx="5041765" cy="523220"/>
+          </a:xfrm>
+          <a:prstGeom prst="rect">
+            <a:avLst/>
+          </a:prstGeom>
+          <a:noFill/>
+        </p:spPr>
+        <p:txBody>
+          <a:bodyPr wrap="none" rtlCol="0">
+            <a:spAutoFit/>
+          </a:bodyPr>
+          <a:lstStyle/>
+          <a:p>
+            <a:r>
+              <a:rPr lang="en-US" sz="2800" dirty="0">
+                <a:latin typeface="Helvetica Light" panose="020B0403020202020204" pitchFamily="34" charset="0"/>
+              </a:rPr>
+              <a:t>Two ways you can run scripts:</a:t>
+            </a:r>
+          </a:p>
+        </p:txBody>
+      </p:sp>
+    </p:spTree>
+    <p:extLst>
+      <p:ext uri="{BB962C8B-B14F-4D97-AF65-F5344CB8AC3E}">
+        <p14:creationId xmlns:p14="http://schemas.microsoft.com/office/powerpoint/2010/main" val="1723000324"/>
+      </p:ext>
+    </p:extLst>
+  </p:cSld>
+  <p:clrMapOvr>
+    <a:masterClrMapping/>
+  </p:clrMapOvr>
+</p:sld>
+</file>
+
+<file path=ppt/slides/slide21.xml><?xml version="1.0" encoding="utf-8"?>
 <p:sld xmlns:a="http://schemas.openxmlformats.org/drawingml/2006/main" xmlns:r="http://schemas.openxmlformats.org/officeDocument/2006/relationships" xmlns:p="http://schemas.openxmlformats.org/presentationml/2006/main">
   <p:cSld>
     <p:spTree>
